--- a/apps/resources/bundled_files/5-klass-burchtar-sabak.pptx
+++ b/apps/resources/bundled_files/5-klass-burchtar-sabak.pptx
@@ -5196,7 +5196,7 @@
                 </a:solidFill>
                 <a:latin typeface="PT Sans"/>
               </a:rPr>
-              <a:t>5-класс · Математика</a:t>
+              <a:t/>
             </a:r>
           </a:p>
         </p:txBody>
@@ -5688,7 +5688,7 @@
                 </a:solidFill>
                 <a:latin typeface="PT Sans"/>
               </a:rPr>
-              <a:t>5-класс ›</a:t>
+              <a:t/>
             </a:r>
           </a:p>
           <a:p>
@@ -6637,7 +6637,7 @@
                 </a:solidFill>
                 <a:latin typeface="PT Sans"/>
               </a:rPr>
-              <a:t>5-класс ›</a:t>
+              <a:t/>
             </a:r>
           </a:p>
           <a:p>
@@ -9913,7 +9913,7 @@
                 </a:solidFill>
                 <a:latin typeface="PT Sans"/>
               </a:rPr>
-              <a:t>5-класс ›</a:t>
+              <a:t/>
             </a:r>
           </a:p>
           <a:p>
@@ -15137,7 +15137,7 @@
                 </a:solidFill>
                 <a:latin typeface="PT Sans"/>
               </a:rPr>
-              <a:t>5-класс ›</a:t>
+              <a:t/>
             </a:r>
           </a:p>
           <a:p>
@@ -16720,7 +16720,7 @@
                 </a:solidFill>
                 <a:latin typeface="PT Sans"/>
               </a:rPr>
-              <a:t>5-класс ›</a:t>
+              <a:t/>
             </a:r>
           </a:p>
           <a:p>
@@ -17432,7 +17432,7 @@
                 </a:solidFill>
                 <a:latin typeface="PT Sans"/>
               </a:rPr>
-              <a:t>5-класс ›</a:t>
+              <a:t/>
             </a:r>
           </a:p>
           <a:p>
@@ -18183,7 +18183,7 @@
                 </a:solidFill>
                 <a:latin typeface="PT Sans"/>
               </a:rPr>
-              <a:t>5-класс ›</a:t>
+              <a:t/>
             </a:r>
           </a:p>
           <a:p>
@@ -19849,7 +19849,7 @@
                 </a:solidFill>
                 <a:latin typeface="PT Sans"/>
               </a:rPr>
-              <a:t>5-класс ›</a:t>
+              <a:t/>
             </a:r>
           </a:p>
           <a:p>
@@ -20933,7 +20933,7 @@
                 </a:solidFill>
                 <a:latin typeface="PT Sans"/>
               </a:rPr>
-              <a:t>5-класс ›</a:t>
+              <a:t/>
             </a:r>
           </a:p>
           <a:p>
@@ -22463,7 +22463,7 @@
                 </a:solidFill>
                 <a:latin typeface="PT Sans"/>
               </a:rPr>
-              <a:t>5-класс ›</a:t>
+              <a:t/>
             </a:r>
           </a:p>
           <a:p>
@@ -24256,7 +24256,7 @@
                 </a:solidFill>
                 <a:latin typeface="PT Sans"/>
               </a:rPr>
-              <a:t>5-класс ›</a:t>
+              <a:t/>
             </a:r>
           </a:p>
           <a:p>
@@ -25533,7 +25533,7 @@
                 </a:solidFill>
                 <a:latin typeface="PT Sans"/>
               </a:rPr>
-              <a:t>5-класс ›</a:t>
+              <a:t/>
             </a:r>
           </a:p>
           <a:p>
@@ -26961,7 +26961,7 @@
                 </a:solidFill>
                 <a:latin typeface="PT Sans"/>
               </a:rPr>
-              <a:t>5-класс ›</a:t>
+              <a:t/>
             </a:r>
           </a:p>
           <a:p>
@@ -28417,7 +28417,7 @@
                 </a:solidFill>
                 <a:latin typeface="PT Sans"/>
               </a:rPr>
-              <a:t>5-класс ›</a:t>
+              <a:t/>
             </a:r>
           </a:p>
           <a:p>
@@ -29487,7 +29487,7 @@
                 </a:solidFill>
                 <a:latin typeface="PT Sans"/>
               </a:rPr>
-              <a:t>5-класс ›</a:t>
+              <a:t/>
             </a:r>
           </a:p>
           <a:p>
@@ -30287,7 +30287,7 @@
                 </a:solidFill>
                 <a:latin typeface="PT Sans"/>
               </a:rPr>
-              <a:t>5-класс ›</a:t>
+              <a:t/>
             </a:r>
           </a:p>
           <a:p>
@@ -31128,7 +31128,7 @@
                 </a:solidFill>
                 <a:latin typeface="PT Sans"/>
               </a:rPr>
-              <a:t>5-класс ›</a:t>
+              <a:t/>
             </a:r>
           </a:p>
           <a:p>
@@ -32077,7 +32077,7 @@
                 </a:solidFill>
                 <a:latin typeface="PT Sans"/>
               </a:rPr>
-              <a:t>5-класс ›</a:t>
+              <a:t/>
             </a:r>
           </a:p>
           <a:p>
@@ -33531,7 +33531,7 @@
                 </a:solidFill>
                 <a:latin typeface="PT Sans"/>
               </a:rPr>
-              <a:t>5-класс ›</a:t>
+              <a:t/>
             </a:r>
           </a:p>
           <a:p>
@@ -34277,7 +34277,7 @@
                 </a:solidFill>
                 <a:latin typeface="PT Sans"/>
               </a:rPr>
-              <a:t>5-класс ›</a:t>
+              <a:t/>
             </a:r>
           </a:p>
           <a:p>
@@ -35085,7 +35085,7 @@
                 </a:solidFill>
                 <a:latin typeface="PT Sans"/>
               </a:rPr>
-              <a:t>5-класс ›</a:t>
+              <a:t/>
             </a:r>
           </a:p>
           <a:p>
@@ -36276,7 +36276,7 @@
                 </a:solidFill>
                 <a:latin typeface="PT Sans"/>
               </a:rPr>
-              <a:t>5-класс ›</a:t>
+              <a:t/>
             </a:r>
           </a:p>
           <a:p>
@@ -37455,7 +37455,7 @@
                 </a:solidFill>
                 <a:latin typeface="PT Sans"/>
               </a:rPr>
-              <a:t>5-класс ›</a:t>
+              <a:t/>
             </a:r>
           </a:p>
           <a:p>
@@ -37636,7 +37636,7 @@
                 </a:solidFill>
                 <a:latin typeface="PT Sans"/>
               </a:rPr>
-              <a:t>3-класс</a:t>
+              <a:t/>
             </a:r>
           </a:p>
         </p:txBody>
@@ -37816,7 +37816,7 @@
                 </a:solidFill>
                 <a:latin typeface="PT Sans"/>
               </a:rPr>
-              <a:t>4-класс</a:t>
+              <a:t/>
             </a:r>
           </a:p>
         </p:txBody>
@@ -37996,7 +37996,7 @@
                 </a:solidFill>
                 <a:latin typeface="PT Sans"/>
               </a:rPr>
-              <a:t>5-класс</a:t>
+              <a:t/>
             </a:r>
           </a:p>
         </p:txBody>
@@ -38232,7 +38232,7 @@
                 </a:solidFill>
                 <a:latin typeface="PT Sans"/>
               </a:rPr>
-              <a:t>6-класс</a:t>
+              <a:t/>
             </a:r>
           </a:p>
         </p:txBody>
@@ -38652,7 +38652,7 @@
                 </a:solidFill>
                 <a:latin typeface="PT Sans"/>
               </a:rPr>
-              <a:t>5-класс ›</a:t>
+              <a:t/>
             </a:r>
           </a:p>
           <a:p>
@@ -39800,7 +39800,7 @@
                 </a:solidFill>
                 <a:latin typeface="PT Sans"/>
               </a:rPr>
-              <a:t>5-класс ›</a:t>
+              <a:t/>
             </a:r>
           </a:p>
           <a:p>

--- a/apps/resources/bundled_files/5-klass-burchtar-sabak.pptx
+++ b/apps/resources/bundled_files/5-klass-burchtar-sabak.pptx
@@ -1582,7 +1582,7 @@
           <a:lstStyle/>
           <a:p>
             <a:r>
-              <a:t>Ой жүгүртүү маданияты (Wenxi Lee, 2.6).</a:t>
+              <a:t>Ой жүгүртүү маданияты (Wenxi Lee, 2,6).</a:t>
             </a:r>
           </a:p>
         </p:txBody>
@@ -9423,7 +9423,7 @@
                 </a:solidFill>
                 <a:latin typeface="PT Sans"/>
               </a:rPr>
-              <a:t>Айлант: бурч чоңоет.</a:t>
+              <a:t>Айлант: бурч чоңоёт.</a:t>
             </a:r>
           </a:p>
         </p:txBody>
